--- a/pitch/Standby-Deck-Editable.pptx
+++ b/pitch/Standby-Deck-Editable.pptx
@@ -2088,7 +2088,7 @@
                 <a:ea typeface="Arial" pitchFamily="34" charset="-122"/>
                 <a:cs typeface="Arial" pitchFamily="34" charset="-120"/>
               </a:rPr>
-              <a:t>T-REX and brooklynONE, 2026</a:t>
+              <a:t>2026</a:t>
             </a:r>
             <a:endParaRPr lang="en-US" sz="900" dirty="0"/>
           </a:p>
